--- a/examples/real/milleleaf-deck.deckcraft.pptx
+++ b/examples/real/milleleaf-deck.deckcraft.pptx
@@ -3540,7 +3540,7 @@
 
 <file path=ppt/slides/slide1.xml><?xml version="1.0" encoding="utf-8"?>
 <p:sld xmlns:a="http://schemas.openxmlformats.org/drawingml/2006/main" xmlns:r="http://schemas.openxmlformats.org/officeDocument/2006/relationships" xmlns:p="http://schemas.openxmlformats.org/presentationml/2006/main">
-  <p:cSld name="ox:a4dda6e5-3f88-50cc-a60f-0cfc36f76261">
+  <p:cSld name="mleaf:a4dda6e5-3f88-50cc-a60f-0cfc36f76261">
     <p:spTree>
       <p:nvGrpSpPr>
         <p:cNvPr id="1" name=""/>
@@ -3557,7 +3557,7 @@
       </p:grpSpPr>
       <p:sp>
         <p:nvSpPr>
-          <p:cNvPr id="258" name="ox:e17c8f5b-124a-538d-8210-832d1d49cd0d"/>
+          <p:cNvPr id="258" name="mleaf:e17c8f5b-124a-538d-8210-832d1d49cd0d"/>
           <p:cNvSpPr txBox="1"/>
           <p:nvPr/>
         </p:nvSpPr>
@@ -3606,7 +3606,7 @@
       </p:sp>
       <p:sp>
         <p:nvSpPr>
-          <p:cNvPr id="259" name="ox:b06ff99a-fe58-5d2a-b929-271cce54c60c"/>
+          <p:cNvPr id="259" name="mleaf:b06ff99a-fe58-5d2a-b929-271cce54c60c"/>
           <p:cNvSpPr txBox="1"/>
           <p:nvPr/>
         </p:nvSpPr>
@@ -3658,7 +3658,7 @@
       </p:sp>
       <p:pic>
         <p:nvPicPr>
-          <p:cNvPr id="260" name="ox:6dcc2557-f941-5d0a-8286-25fa9a8bb8c3" descr="mark.png"/>
+          <p:cNvPr id="260" name="mleaf:6dcc2557-f941-5d0a-8286-25fa9a8bb8c3" descr="mark.png"/>
           <p:cNvPicPr>
             <a:picLocks noChangeAspect="1"/>
           </p:cNvPicPr>
@@ -3690,7 +3690,7 @@
 
 <file path=ppt/slides/slide2.xml><?xml version="1.0" encoding="utf-8"?>
 <p:sld xmlns:a="http://schemas.openxmlformats.org/drawingml/2006/main" xmlns:r="http://schemas.openxmlformats.org/officeDocument/2006/relationships" xmlns:p="http://schemas.openxmlformats.org/presentationml/2006/main">
-  <p:cSld name="ox:2c51316c-fa2f-5343-a4db-aa6cd152efa1">
+  <p:cSld name="mleaf:2c51316c-fa2f-5343-a4db-aa6cd152efa1">
     <p:spTree>
       <p:nvGrpSpPr>
         <p:cNvPr id="1" name=""/>
@@ -3707,7 +3707,7 @@
       </p:grpSpPr>
       <p:sp>
         <p:nvSpPr>
-          <p:cNvPr id="263" name="ox:5df6afb0-d370-595c-9bb5-a4427b92acb7"/>
+          <p:cNvPr id="263" name="mleaf:5df6afb0-d370-595c-9bb5-a4427b92acb7"/>
           <p:cNvSpPr txBox="1"/>
           <p:nvPr/>
         </p:nvSpPr>
@@ -3756,7 +3756,7 @@
       </p:sp>
       <p:sp>
         <p:nvSpPr>
-          <p:cNvPr id="264" name="ox:2c3e6ccb-8456-5c29-94ea-c27cd4bbf21f"/>
+          <p:cNvPr id="264" name="mleaf:2c3e6ccb-8456-5c29-94ea-c27cd4bbf21f"/>
           <p:cNvSpPr txBox="1"/>
           <p:nvPr/>
         </p:nvSpPr>
@@ -3971,7 +3971,7 @@
 
 <file path=ppt/slides/slide3.xml><?xml version="1.0" encoding="utf-8"?>
 <p:sld xmlns:a="http://schemas.openxmlformats.org/drawingml/2006/main" xmlns:r="http://schemas.openxmlformats.org/officeDocument/2006/relationships" xmlns:p="http://schemas.openxmlformats.org/presentationml/2006/main">
-  <p:cSld name="ox:fe484066-e0eb-58cf-a008-440e842b56c7">
+  <p:cSld name="mleaf:fe484066-e0eb-58cf-a008-440e842b56c7">
     <p:spTree>
       <p:nvGrpSpPr>
         <p:cNvPr id="1" name=""/>
@@ -3988,7 +3988,7 @@
       </p:grpSpPr>
       <p:sp>
         <p:nvSpPr>
-          <p:cNvPr id="266" name="ox:87145175-ada9-53e8-87bb-7ae36098a209"/>
+          <p:cNvPr id="266" name="mleaf:87145175-ada9-53e8-87bb-7ae36098a209"/>
           <p:cNvSpPr txBox="1"/>
           <p:nvPr/>
         </p:nvSpPr>
@@ -4037,7 +4037,7 @@
       </p:sp>
       <p:sp>
         <p:nvSpPr>
-          <p:cNvPr id="267" name="ox:d08f732f-2569-5de9-bd79-71c56621940e"/>
+          <p:cNvPr id="267" name="mleaf:d08f732f-2569-5de9-bd79-71c56621940e"/>
           <p:cNvSpPr txBox="1"/>
           <p:nvPr/>
         </p:nvSpPr>
@@ -4093,7 +4093,7 @@
       </p:sp>
       <p:graphicFrame>
         <p:nvGraphicFramePr>
-          <p:cNvPr id="268" name="ox:c13a316c-a4e6-54d1-ba22-3d1990e38814"/>
+          <p:cNvPr id="268" name="mleaf:c13a316c-a4e6-54d1-ba22-3d1990e38814"/>
           <p:cNvGraphicFramePr>
             <a:graphicFrameLocks noGrp="1"/>
           </p:cNvGraphicFramePr>
@@ -4772,7 +4772,7 @@
 
 <file path=ppt/slides/slide4.xml><?xml version="1.0" encoding="utf-8"?>
 <p:sld xmlns:a="http://schemas.openxmlformats.org/drawingml/2006/main" xmlns:r="http://schemas.openxmlformats.org/officeDocument/2006/relationships" xmlns:p="http://schemas.openxmlformats.org/presentationml/2006/main">
-  <p:cSld name="ox:ee934aa1-9f2f-56a4-8cc6-99db20fc969d">
+  <p:cSld name="mleaf:ee934aa1-9f2f-56a4-8cc6-99db20fc969d">
     <p:spTree>
       <p:nvGrpSpPr>
         <p:cNvPr id="1" name=""/>
@@ -4789,7 +4789,7 @@
       </p:grpSpPr>
       <p:sp>
         <p:nvSpPr>
-          <p:cNvPr id="270" name="ox:112d1341-5f3b-5774-b9f9-c9c8124aa696"/>
+          <p:cNvPr id="270" name="mleaf:112d1341-5f3b-5774-b9f9-c9c8124aa696"/>
           <p:cNvSpPr txBox="1"/>
           <p:nvPr/>
         </p:nvSpPr>
@@ -4838,7 +4838,7 @@
       </p:sp>
       <p:sp>
         <p:nvSpPr>
-          <p:cNvPr id="271" name="ox:fe89d69a-83d4-5679-a3d3-ccad43f16ace"/>
+          <p:cNvPr id="271" name="mleaf:fe89d69a-83d4-5679-a3d3-ccad43f16ace"/>
           <p:cNvSpPr/>
           <p:nvPr/>
         </p:nvSpPr>
@@ -4891,7 +4891,7 @@
       </p:sp>
       <p:sp>
         <p:nvSpPr>
-          <p:cNvPr id="272" name="ox:70cfccb9-8743-5ee2-8d22-d3833a134ac8"/>
+          <p:cNvPr id="272" name="mleaf:70cfccb9-8743-5ee2-8d22-d3833a134ac8"/>
           <p:cNvSpPr/>
           <p:nvPr/>
         </p:nvSpPr>
@@ -4944,7 +4944,7 @@
       </p:sp>
       <p:sp>
         <p:nvSpPr>
-          <p:cNvPr id="273" name="ox:3d3b2f75-54d3-5bd3-8ff9-2a9378bc2943"/>
+          <p:cNvPr id="273" name="mleaf:3d3b2f75-54d3-5bd3-8ff9-2a9378bc2943"/>
           <p:cNvSpPr/>
           <p:nvPr/>
         </p:nvSpPr>
@@ -4997,7 +4997,7 @@
       </p:sp>
       <p:sp>
         <p:nvSpPr>
-          <p:cNvPr id="274" name="ox:b66f34d0-0949-5c9c-819a-5041c656bd48"/>
+          <p:cNvPr id="274" name="mleaf:b66f34d0-0949-5c9c-819a-5041c656bd48"/>
           <p:cNvSpPr/>
           <p:nvPr/>
         </p:nvSpPr>
@@ -5050,7 +5050,7 @@
       </p:sp>
       <p:cxnSp>
         <p:nvCxnSpPr>
-          <p:cNvPr id="275" name="ox:e8b48068-ea77-586c-ab43-627cb00f233d"/>
+          <p:cNvPr id="275" name="mleaf:e8b48068-ea77-586c-ab43-627cb00f233d"/>
           <p:cNvCxnSpPr>
             <a:stCxn id="271" idx="3"/>
             <a:endCxn id="272" idx="1"/>
@@ -5077,7 +5077,7 @@
       </p:cxnSp>
       <p:cxnSp>
         <p:nvCxnSpPr>
-          <p:cNvPr id="276" name="ox:0229f7e3-cbf1-5f84-8efb-30ffee4db22b"/>
+          <p:cNvPr id="276" name="mleaf:0229f7e3-cbf1-5f84-8efb-30ffee4db22b"/>
           <p:cNvCxnSpPr>
             <a:stCxn id="272" idx="3"/>
             <a:endCxn id="273" idx="1"/>
@@ -5104,7 +5104,7 @@
       </p:cxnSp>
       <p:cxnSp>
         <p:nvCxnSpPr>
-          <p:cNvPr id="277" name="ox:763fe3e3-fef1-5f8a-8a43-26372e2391ba"/>
+          <p:cNvPr id="277" name="mleaf:763fe3e3-fef1-5f8a-8a43-26372e2391ba"/>
           <p:cNvCxnSpPr>
             <a:stCxn id="273" idx="3"/>
             <a:endCxn id="274" idx="1"/>
@@ -5131,7 +5131,7 @@
       </p:cxnSp>
       <p:cxnSp>
         <p:nvCxnSpPr>
-          <p:cNvPr id="278" name="ox:ab78373f-7016-55cb-9826-f9af625bb9ae"/>
+          <p:cNvPr id="278" name="mleaf:ab78373f-7016-55cb-9826-f9af625bb9ae"/>
           <p:cNvCxnSpPr/>
           <p:nvPr/>
         </p:nvCxnSpPr>
@@ -5163,7 +5163,7 @@
 
 <file path=ppt/slides/slide5.xml><?xml version="1.0" encoding="utf-8"?>
 <p:sld xmlns:a="http://schemas.openxmlformats.org/drawingml/2006/main" xmlns:r="http://schemas.openxmlformats.org/officeDocument/2006/relationships" xmlns:p="http://schemas.openxmlformats.org/presentationml/2006/main">
-  <p:cSld name="ox:d9a80f20-1e58-5d54-abaf-5b8a1542251b">
+  <p:cSld name="mleaf:d9a80f20-1e58-5d54-abaf-5b8a1542251b">
     <p:spTree>
       <p:nvGrpSpPr>
         <p:cNvPr id="1" name=""/>
@@ -5180,7 +5180,7 @@
       </p:grpSpPr>
       <p:sp>
         <p:nvSpPr>
-          <p:cNvPr id="280" name="ox:a4853a04-5b4d-5543-96ac-05ef78137a1b"/>
+          <p:cNvPr id="280" name="mleaf:a4853a04-5b4d-5543-96ac-05ef78137a1b"/>
           <p:cNvSpPr txBox="1"/>
           <p:nvPr/>
         </p:nvSpPr>
@@ -5237,7 +5237,7 @@
 
 <file path=ppt/slides/slide6.xml><?xml version="1.0" encoding="utf-8"?>
 <p:sld xmlns:a="http://schemas.openxmlformats.org/drawingml/2006/main" xmlns:r="http://schemas.openxmlformats.org/officeDocument/2006/relationships" xmlns:p="http://schemas.openxmlformats.org/presentationml/2006/main">
-  <p:cSld name="ox:d26a4c28-8f12-5c03-9ffe-6cb0f1a48f18">
+  <p:cSld name="mleaf:d26a4c28-8f12-5c03-9ffe-6cb0f1a48f18">
     <p:spTree>
       <p:nvGrpSpPr>
         <p:cNvPr id="1" name=""/>
@@ -5254,7 +5254,7 @@
       </p:grpSpPr>
       <p:sp>
         <p:nvSpPr>
-          <p:cNvPr id="282" name="ox:1c3f0704-0f0a-589e-95fa-7282b64fdcef"/>
+          <p:cNvPr id="282" name="mleaf:1c3f0704-0f0a-589e-95fa-7282b64fdcef"/>
           <p:cNvSpPr txBox="1"/>
           <p:nvPr/>
         </p:nvSpPr>
@@ -5311,7 +5311,7 @@
 
 <file path=ppt/slides/slide7.xml><?xml version="1.0" encoding="utf-8"?>
 <p:sld xmlns:a="http://schemas.openxmlformats.org/drawingml/2006/main" xmlns:r="http://schemas.openxmlformats.org/officeDocument/2006/relationships" xmlns:p="http://schemas.openxmlformats.org/presentationml/2006/main">
-  <p:cSld name="ox:fce8316d-0d18-528c-ab9c-6300c6f3f42b">
+  <p:cSld name="mleaf:fce8316d-0d18-528c-ab9c-6300c6f3f42b">
     <p:spTree>
       <p:nvGrpSpPr>
         <p:cNvPr id="1" name=""/>
@@ -5328,7 +5328,7 @@
       </p:grpSpPr>
       <p:sp>
         <p:nvSpPr>
-          <p:cNvPr id="284" name="ox:3931a9cf-2762-58da-8f6b-4844649bda74"/>
+          <p:cNvPr id="284" name="mleaf:3931a9cf-2762-58da-8f6b-4844649bda74"/>
           <p:cNvSpPr txBox="1"/>
           <p:nvPr/>
         </p:nvSpPr>
@@ -5377,7 +5377,7 @@
       </p:sp>
       <p:pic>
         <p:nvPicPr>
-          <p:cNvPr id="285" name="ox:535f73ca-aa6c-563e-bc0a-7f2ebb8a8725" descr="chart.jpg"/>
+          <p:cNvPr id="285" name="mleaf:535f73ca-aa6c-563e-bc0a-7f2ebb8a8725" descr="chart.jpg"/>
           <p:cNvPicPr>
             <a:picLocks noChangeAspect="1"/>
           </p:cNvPicPr>
@@ -5402,7 +5402,7 @@
       </p:pic>
       <p:sp>
         <p:nvSpPr>
-          <p:cNvPr id="287" name="ox:a79d358b-948a-58de-8699-2d23702ab6f6"/>
+          <p:cNvPr id="287" name="mleaf:a79d358b-948a-58de-8699-2d23702ab6f6"/>
           <p:cNvSpPr txBox="1"/>
           <p:nvPr/>
         </p:nvSpPr>
@@ -5462,7 +5462,7 @@
 
 <file path=ppt/slides/slide8.xml><?xml version="1.0" encoding="utf-8"?>
 <p:sld xmlns:a="http://schemas.openxmlformats.org/drawingml/2006/main" xmlns:r="http://schemas.openxmlformats.org/officeDocument/2006/relationships" xmlns:p="http://schemas.openxmlformats.org/presentationml/2006/main">
-  <p:cSld name="ox:97c0dd8d-a375-5dfa-82e0-612ec64d5d71">
+  <p:cSld name="mleaf:97c0dd8d-a375-5dfa-82e0-612ec64d5d71">
     <p:spTree>
       <p:nvGrpSpPr>
         <p:cNvPr id="1" name=""/>
@@ -5479,7 +5479,7 @@
       </p:grpSpPr>
       <p:sp>
         <p:nvSpPr>
-          <p:cNvPr id="289" name="ox:783617a4-9f7d-5fb8-b072-ad493db17293"/>
+          <p:cNvPr id="289" name="mleaf:783617a4-9f7d-5fb8-b072-ad493db17293"/>
           <p:cNvSpPr txBox="1"/>
           <p:nvPr/>
         </p:nvSpPr>
@@ -5528,7 +5528,7 @@
       </p:sp>
       <p:sp>
         <p:nvSpPr>
-          <p:cNvPr id="290" name="ox:194a2640-dc98-5c48-83a4-6e5a553640c9"/>
+          <p:cNvPr id="290" name="mleaf:194a2640-dc98-5c48-83a4-6e5a553640c9"/>
           <p:cNvSpPr txBox="1"/>
           <p:nvPr/>
         </p:nvSpPr>
@@ -5580,7 +5580,7 @@
       </p:sp>
       <p:sp>
         <p:nvSpPr>
-          <p:cNvPr id="291" name="ox:9681ce91-66e6-5999-98a0-e1988d51754e"/>
+          <p:cNvPr id="291" name="mleaf:9681ce91-66e6-5999-98a0-e1988d51754e"/>
           <p:cNvSpPr txBox="1"/>
           <p:nvPr/>
         </p:nvSpPr>
@@ -5632,7 +5632,7 @@
       </p:sp>
       <p:graphicFrame>
         <p:nvGraphicFramePr>
-          <p:cNvPr id="292" name="ox:9a9d4429-ffc4-514f-bd70-68ca13e2bfb1"/>
+          <p:cNvPr id="292" name="mleaf:9a9d4429-ffc4-514f-bd70-68ca13e2bfb1"/>
           <p:cNvGraphicFramePr>
             <a:graphicFrameLocks noGrp="1"/>
           </p:cNvGraphicFramePr>
@@ -6020,7 +6020,7 @@
 
 <file path=ppt/slides/slide9.xml><?xml version="1.0" encoding="utf-8"?>
 <p:sld xmlns:a="http://schemas.openxmlformats.org/drawingml/2006/main" xmlns:r="http://schemas.openxmlformats.org/officeDocument/2006/relationships" xmlns:p="http://schemas.openxmlformats.org/presentationml/2006/main">
-  <p:cSld name="ox:85246511-9134-54ab-bf41-5aee5d04e021">
+  <p:cSld name="mleaf:85246511-9134-54ab-bf41-5aee5d04e021">
     <p:spTree>
       <p:nvGrpSpPr>
         <p:cNvPr id="1" name=""/>
@@ -6037,7 +6037,7 @@
       </p:grpSpPr>
       <p:sp>
         <p:nvSpPr>
-          <p:cNvPr id="294" name="ox:119b3989-72c9-50df-ae8e-4dbc13d49f4e"/>
+          <p:cNvPr id="294" name="mleaf:119b3989-72c9-50df-ae8e-4dbc13d49f4e"/>
           <p:cNvSpPr txBox="1"/>
           <p:nvPr/>
         </p:nvSpPr>
@@ -6086,7 +6086,7 @@
       </p:sp>
       <p:sp>
         <p:nvSpPr>
-          <p:cNvPr id="295" name="ox:52cb8aaf-58b4-557a-bb3c-ec7236b79f07"/>
+          <p:cNvPr id="295" name="mleaf:52cb8aaf-58b4-557a-bb3c-ec7236b79f07"/>
           <p:cNvSpPr txBox="1"/>
           <p:nvPr/>
         </p:nvSpPr>
@@ -6165,7 +6165,7 @@
       </p:sp>
       <p:pic>
         <p:nvPicPr>
-          <p:cNvPr id="296" name="ox:b7e5fa70-def2-5cf6-bac7-32a86718c29c" descr="mark.png"/>
+          <p:cNvPr id="296" name="mleaf:b7e5fa70-def2-5cf6-bac7-32a86718c29c" descr="mark.png"/>
           <p:cNvPicPr>
             <a:picLocks noChangeAspect="1"/>
           </p:cNvPicPr>
